--- a/docs/VisionMotion_Final_Presentation.pptx
+++ b/docs/VisionMotion_Final_Presentation.pptx
@@ -4516,7 +4516,7 @@
                 <a:ea typeface="Microsoft YaHei"/>
                 <a:cs typeface="Microsoft YaHei"/>
               </a:rPr>
-              <a:t>GitHub repository: 待创建</a:t>
+              <a:t>GitHub repository: https://github.com/yangzi0808/VisionMotion</a:t>
             </a:r>
           </a:p>
         </p:txBody>
